--- a/cursos/recursos/arbitro-nacional/10-los-deberes-y-poderes-de-la-persona-arbitra.pptx
+++ b/cursos/recursos/arbitro-nacional/10-los-deberes-y-poderes-de-la-persona-arbitra.pptx
@@ -3955,7 +3955,7 @@
                 </a:solidFill>
                 <a:latin typeface="Calibri"/>
               </a:rPr>
-              <a:t>El árbitro debe intervenir si observa jugadas ilegales, posiciones incorrectas o dispositivos prohibidos, sin esperar reclamo (art. 12.4); debe indicar cuando termina un período de control si eso no es visible en el reloj (12.5); y puede otorgar tiempo adicional a un jugador si el rival, un espectador o la organización lo perturbaron indebidamente (12.7) — este último es discrecional, así que quien arbitra necesita poder justificarlo con lo que observó, no solo con lo que le contaron.</a:t>
+              <a:t>El deber de intervenir sin esperar reclamo no vive en un solo número: está repetido artículo por artículo cada vez que hace falta (4.8 con la pieza tocada, 7.5.1 con la jugada ilegal, 12.1 en general) — quien arbitra no necesita que un jugador se queje para actuar. Lo que SÍ tiene su propio artículo es lo contrario: el 12.6 le prohíbe ayudar de más — no puede decir cuántas jugadas lleva cada quien (salvo aplicando el 8.5 con una bandera ya caída) ni avisar que el rival ya movió o que a alguien se le olvidó presionar el reloj. Y el 12.5 sí lo autoriza a dar tiempo adicional a un jugador perturbado indebidamente por el rival, un espectador o la organización — ese es discrecional, así que hay que poder justificarlo con lo observado, no con lo que le contaron.</a:t>
             </a:r>
           </a:p>
         </p:txBody>
@@ -4198,7 +4198,7 @@
                 </a:solidFill>
                 <a:latin typeface="Calibri"/>
               </a:rPr>
-              <a:t>El artículo 12.8 permite que un jugador apele cualquier decisión del árbitro ante el comité de apelación, si el reglamento del torneo prevé uno; hasta que se resuelve la apelación, la decisión original del árbitro se mantiene, salvo que el propio reglamento del torneo diga otra cosa. Saber esto de memoria evita el error de "congelar" una partida por las dudas mientras se arma un comité.</a:t>
+              <a:t>El derecho a apelar cualquier decisión del árbitro es del jugador, no del árbitro (art. 11.10) — y vale incluso si ya firmó la planilla, si el reglamento del torneo no dice lo contrario. Mientras se resuelve la apelación, la decisión original se mantiene y la partida sigue como el árbitro la dejó, salvo que el propio reglamento diga otra cosa. Saber esto de memoria evita el error de "congelar" una partida por las dudas mientras se arma un comité.</a:t>
             </a:r>
           </a:p>
         </p:txBody>
